--- a/materialien/Videos/05_ER-Modelle/DD_Video05_ER-Modelle_Folien.pptx
+++ b/materialien/Videos/05_ER-Modelle/DD_Video05_ER-Modelle_Folien.pptx
@@ -1078,7 +1078,7 @@
           <a:lstStyle/>
           <a:p>
             <a:r>
-              <a:t>Jetzt du. Modelliere: Jede Futtersorte wird von genau einem Lieferanten geliefert, ein Lieferant liefert mehrere Sorten. Jedes Tier bekommt mehrere Futtersorten, und eine Sorte wird an mehrere Tiere verfüttert – jeweils mit einer Tagesmenge. Zeichne das ER-Modell mit Schlüsselattributen und Kardinalitäten. Halte das Video an – oder zeichne es direkt im Bauplan-Tisch.</a:t>
+              <a:t>Jetzt du. Entwirf ein ER-Modell: Jede Futtersorte wird von genau einem Lieferanten geliefert, ein Lieferant liefert mehrere Sorten. Jedes Tier bekommt mehrere Futtersorten, und eine Sorte wird an mehrere Tiere verfüttert – jeweils mit einer Tagesmenge. Zeichne das ER-Modell mit Schlüsselattributen und Kardinalitäten. Halte das Video an – oder zeichne es direkt im Bauplan-Tisch.</a:t>
             </a:r>
           </a:p>
         </p:txBody>
@@ -9414,7 +9414,7 @@
                 </a:solidFill>
                 <a:latin typeface="Barlow"/>
               </a:rPr>
-              <a:t>Modelliere in Chen-Notation:</a:t>
+              <a:t>Entwirf ein ER-Modell in Chen-Notation:</a:t>
             </a:r>
           </a:p>
         </p:txBody>
